--- a/scorecard-General/PAGINA-2BI/academia/materiales/11_VIP_InCompany_Presentacion_Comercial.pptx
+++ b/scorecard-General/PAGINA-2BI/academia/materiales/11_VIP_InCompany_Presentacion_Comercial.pptx
@@ -3161,7 +3161,7 @@
                 <a:ea typeface="Calibri" pitchFamily="34" charset="-122"/>
                 <a:cs typeface="Calibri" pitchFamily="34" charset="-120"/>
               </a:rPr>
-              <a:t>Bono 2 — Setup gratuito de Microsoft Fabric (si aplica)</a:t>
+              <a:t>Bono 2 — Setup gratuito de Power BI Service workspace + Pipelines</a:t>
             </a:r>
             <a:endParaRPr lang="en-US" sz="1400" dirty="0"/>
           </a:p>
@@ -3200,7 +3200,7 @@
                 <a:ea typeface="Calibri" pitchFamily="34" charset="-122"/>
                 <a:cs typeface="Calibri" pitchFamily="34" charset="-120"/>
               </a:rPr>
-              <a:t>Configuración inicial de Fabric capacity + Lakehouse + Direct Lake.</a:t>
+              <a:t>Configuración profesional de workspace, Apps, Pipelines DEV/TEST/PROD y RLS dinámico.</a:t>
             </a:r>
             <a:endParaRPr lang="en-US" sz="1100" dirty="0"/>
           </a:p>
@@ -3484,7 +3484,7 @@
                 <a:ea typeface="Calibri" pitchFamily="34" charset="-122"/>
                 <a:cs typeface="Calibri" pitchFamily="34" charset="-120"/>
               </a:rPr>
-              <a:t>Tu equipo recibe novedades de Power BI/Fabric cada quarter.</a:t>
+              <a:t>Tu equipo recibe novedades y best practices de Power BI cada quarter.</a:t>
             </a:r>
             <a:endParaRPr lang="en-US" sz="1100" dirty="0"/>
           </a:p>
@@ -6165,7 +6165,7 @@
                 <a:ea typeface="Calibri" pitchFamily="34" charset="-122"/>
                 <a:cs typeface="Calibri" pitchFamily="34" charset="-120"/>
               </a:rPr>
-              <a:t>✓  Tienes Power BI Premium o Fabric subutilizado.</a:t>
+              <a:t>✓  Tienes Power BI Premium o Power BI Premium subutilizado.</a:t>
             </a:r>
             <a:endParaRPr lang="en-US" sz="1200" dirty="0"/>
           </a:p>
@@ -9828,7 +9828,7 @@
                 <a:ea typeface="Calibri" pitchFamily="34" charset="-122"/>
                 <a:cs typeface="Calibri" pitchFamily="34" charset="-120"/>
               </a:rPr>
-              <a:t>Power BI Premium / Fabric ya está pagado, pero la organización no lo aprovecha.</a:t>
+              <a:t>Power BI Premium / Power BI Premium ya está pagado, pero la organización no lo aprovecha.</a:t>
             </a:r>
             <a:endParaRPr lang="en-US" sz="1200" dirty="0"/>
           </a:p>
@@ -11161,7 +11161,7 @@
                 <a:ea typeface="Calibri" pitchFamily="34" charset="-122"/>
                 <a:cs typeface="Calibri" pitchFamily="34" charset="-120"/>
               </a:rPr>
-              <a:t>✓  Capacidad Premium / Fabric explotada al 100%.</a:t>
+              <a:t>✓  Capacidad Premium / Power BI Premium explotada al 100%.</a:t>
             </a:r>
             <a:endParaRPr lang="en-US" sz="1300" dirty="0"/>
           </a:p>
@@ -11618,7 +11618,7 @@
                 <a:ea typeface="Calibri" pitchFamily="34" charset="-122"/>
                 <a:cs typeface="Calibri" pitchFamily="34" charset="-120"/>
               </a:rPr>
-              <a:t>★  Microsoft Fabric, Direct Lake y Semantic Link.</a:t>
+              <a:t>★  Power BI Premium, Premium Capacity y Semantic Link.</a:t>
             </a:r>
             <a:endParaRPr lang="en-US" sz="1300" dirty="0"/>
           </a:p>
@@ -11657,7 +11657,7 @@
                 <a:ea typeface="Calibri" pitchFamily="34" charset="-122"/>
                 <a:cs typeface="Calibri" pitchFamily="34" charset="-120"/>
               </a:rPr>
-              <a:t>★  Python (sempy, pandas, scikit-learn) y AI agents.</a:t>
+              <a:t>★  Python (DAX Studio, pandas, Tabular Editor) y AI agents.</a:t>
             </a:r>
             <a:endParaRPr lang="en-US" sz="1300" dirty="0"/>
           </a:p>
@@ -11696,7 +11696,7 @@
                 <a:ea typeface="Calibri" pitchFamily="34" charset="-122"/>
                 <a:cs typeface="Calibri" pitchFamily="34" charset="-120"/>
               </a:rPr>
-              <a:t>★  n8n, Anthropic Claude, orquestación de agentes.</a:t>
+              <a:t>★  Power BI Subscriptions, Smart Narrative, orquestación de agentes.</a:t>
             </a:r>
             <a:endParaRPr lang="en-US" sz="1300" dirty="0"/>
           </a:p>
@@ -13116,7 +13116,7 @@
                 <a:ea typeface="Calibri" pitchFamily="34" charset="-122"/>
                 <a:cs typeface="Calibri" pitchFamily="34" charset="-120"/>
               </a:rPr>
-              <a:t>UX/UI corporativo + Tema con tu marca</a:t>
+              <a:t>UX/UI corporativo + Tema con marca</a:t>
             </a:r>
             <a:endParaRPr lang="en-US" sz="1100" dirty="0"/>
           </a:p>
@@ -13285,7 +13285,7 @@
                 <a:ea typeface="Calibri" pitchFamily="34" charset="-122"/>
                 <a:cs typeface="Calibri" pitchFamily="34" charset="-120"/>
               </a:rPr>
-              <a:t>Optimización + Best Practice Analyzer</a:t>
+              <a:t>Optimización + BPA + ALM Toolkit</a:t>
             </a:r>
             <a:endParaRPr lang="en-US" sz="1100" dirty="0"/>
           </a:p>
@@ -13324,7 +13324,7 @@
                 <a:ea typeface="Calibri" pitchFamily="34" charset="-122"/>
                 <a:cs typeface="Calibri" pitchFamily="34" charset="-120"/>
               </a:rPr>
-              <a:t>1 ses.</a:t>
+              <a:t>2 ses.</a:t>
             </a:r>
             <a:endParaRPr lang="en-US" sz="900" dirty="0"/>
           </a:p>
@@ -13454,7 +13454,7 @@
                 <a:ea typeface="Calibri" pitchFamily="34" charset="-122"/>
                 <a:cs typeface="Calibri" pitchFamily="34" charset="-120"/>
               </a:rPr>
-              <a:t>Service: RLS, Pipelines, REST API, .pbip + Git</a:t>
+              <a:t>Power BI Service: workspaces, RLS dinámico, Apps</a:t>
             </a:r>
             <a:endParaRPr lang="en-US" sz="1100" dirty="0"/>
           </a:p>
@@ -13623,7 +13623,7 @@
                 <a:ea typeface="Calibri" pitchFamily="34" charset="-122"/>
                 <a:cs typeface="Calibri" pitchFamily="34" charset="-120"/>
               </a:rPr>
-              <a:t>Microsoft Fabric (si aplica)</a:t>
+              <a:t>Pipelines DEV/TEST/PROD + REST API</a:t>
             </a:r>
             <a:endParaRPr lang="en-US" sz="1100" dirty="0"/>
           </a:p>
@@ -13792,7 +13792,7 @@
                 <a:ea typeface="Calibri" pitchFamily="34" charset="-122"/>
                 <a:cs typeface="Calibri" pitchFamily="34" charset="-120"/>
               </a:rPr>
-              <a:t>Workshop ejecutivo de cierre</a:t>
+              <a:t>.pbip + TMDL + Git para versionado</a:t>
             </a:r>
             <a:endParaRPr lang="en-US" sz="1100" dirty="0"/>
           </a:p>
@@ -13961,7 +13961,7 @@
                 <a:ea typeface="Calibri" pitchFamily="34" charset="-122"/>
                 <a:cs typeface="Calibri" pitchFamily="34" charset="-120"/>
               </a:rPr>
-              <a:t>Documentación y handoff</a:t>
+              <a:t>Sensitivity Labels + Audit Logs + Compliance</a:t>
             </a:r>
             <a:endParaRPr lang="en-US" sz="1100" dirty="0"/>
           </a:p>
@@ -14008,7 +14008,176 @@
       </p:sp>
       <p:sp>
         <p:nvSpPr>
-          <p:cNvPr id="66" name="Text 63"/>
+          <p:cNvPr id="66" name="Shape 63"/>
+          <p:cNvSpPr/>
+          <p:nvPr/>
+        </p:nvSpPr>
+        <p:spPr>
+          <a:xfrm>
+            <a:off x="502920" y="6629400"/>
+            <a:ext cx="2788920" cy="1371600"/>
+          </a:xfrm>
+          <a:prstGeom prst="roundRect">
+            <a:avLst>
+              <a:gd name="adj" fmla="val 6667"/>
+            </a:avLst>
+          </a:prstGeom>
+          <a:solidFill>
+            <a:srgbClr val="0F1B2D"/>
+          </a:solidFill>
+          <a:ln w="12700">
+            <a:solidFill>
+              <a:srgbClr val="2F6F4E"/>
+            </a:solidFill>
+            <a:prstDash val="solid"/>
+          </a:ln>
+        </p:spPr>
+      </p:sp>
+      <p:sp>
+        <p:nvSpPr>
+          <p:cNvPr id="67" name="Shape 64"/>
+          <p:cNvSpPr/>
+          <p:nvPr/>
+        </p:nvSpPr>
+        <p:spPr>
+          <a:xfrm>
+            <a:off x="640080" y="6766560"/>
+            <a:ext cx="502920" cy="502920"/>
+          </a:xfrm>
+          <a:prstGeom prst="ellipse">
+            <a:avLst/>
+          </a:prstGeom>
+          <a:solidFill>
+            <a:srgbClr val="2F6F4E"/>
+          </a:solidFill>
+          <a:ln w="12700">
+            <a:solidFill>
+              <a:srgbClr val="2F6F4E"/>
+            </a:solidFill>
+            <a:prstDash val="solid"/>
+          </a:ln>
+        </p:spPr>
+      </p:sp>
+      <p:sp>
+        <p:nvSpPr>
+          <p:cNvPr id="68" name="Text 65"/>
+          <p:cNvSpPr/>
+          <p:nvPr/>
+        </p:nvSpPr>
+        <p:spPr>
+          <a:xfrm>
+            <a:off x="640080" y="6766560"/>
+            <a:ext cx="502920" cy="502920"/>
+          </a:xfrm>
+          <a:prstGeom prst="rect">
+            <a:avLst/>
+          </a:prstGeom>
+          <a:noFill/>
+          <a:ln/>
+        </p:spPr>
+        <p:txBody>
+          <a:bodyPr wrap="square" rtlCol="0" anchor="ctr"/>
+          <a:lstStyle/>
+          <a:p>
+            <a:pPr algn="ctr" indent="0" marL="0">
+              <a:buNone/>
+            </a:pPr>
+            <a:r>
+              <a:rPr lang="en-US" sz="1800" b="1" dirty="0">
+                <a:solidFill>
+                  <a:srgbClr val="0F1B2D"/>
+                </a:solidFill>
+                <a:latin typeface="Calibri" pitchFamily="34" charset="0"/>
+                <a:ea typeface="Calibri" pitchFamily="34" charset="-122"/>
+                <a:cs typeface="Calibri" pitchFamily="34" charset="-120"/>
+              </a:rPr>
+              <a:t>13</a:t>
+            </a:r>
+            <a:endParaRPr lang="en-US" sz="1800" dirty="0"/>
+          </a:p>
+        </p:txBody>
+      </p:sp>
+      <p:sp>
+        <p:nvSpPr>
+          <p:cNvPr id="69" name="Text 66"/>
+          <p:cNvSpPr/>
+          <p:nvPr/>
+        </p:nvSpPr>
+        <p:spPr>
+          <a:xfrm>
+            <a:off x="640080" y="7342632"/>
+            <a:ext cx="2514600" cy="411480"/>
+          </a:xfrm>
+          <a:prstGeom prst="rect">
+            <a:avLst/>
+          </a:prstGeom>
+          <a:noFill/>
+          <a:ln/>
+        </p:spPr>
+        <p:txBody>
+          <a:bodyPr wrap="square" rtlCol="0" anchor="ctr"/>
+          <a:lstStyle/>
+          <a:p>
+            <a:pPr indent="0" marL="0">
+              <a:buNone/>
+            </a:pPr>
+            <a:r>
+              <a:rPr lang="en-US" sz="1100" b="1" dirty="0">
+                <a:solidFill>
+                  <a:srgbClr val="FFFFFF"/>
+                </a:solidFill>
+                <a:latin typeface="Calibri" pitchFamily="34" charset="0"/>
+                <a:ea typeface="Calibri" pitchFamily="34" charset="-122"/>
+                <a:cs typeface="Calibri" pitchFamily="34" charset="-120"/>
+              </a:rPr>
+              <a:t>Workshop ejecutivo de cierre + Handoff 90 días</a:t>
+            </a:r>
+            <a:endParaRPr lang="en-US" sz="1100" dirty="0"/>
+          </a:p>
+        </p:txBody>
+      </p:sp>
+      <p:sp>
+        <p:nvSpPr>
+          <p:cNvPr id="70" name="Text 67"/>
+          <p:cNvSpPr/>
+          <p:nvPr/>
+        </p:nvSpPr>
+        <p:spPr>
+          <a:xfrm>
+            <a:off x="640080" y="7708392"/>
+            <a:ext cx="2514600" cy="274320"/>
+          </a:xfrm>
+          <a:prstGeom prst="rect">
+            <a:avLst/>
+          </a:prstGeom>
+          <a:noFill/>
+          <a:ln/>
+        </p:spPr>
+        <p:txBody>
+          <a:bodyPr wrap="square" rtlCol="0" anchor="ctr"/>
+          <a:lstStyle/>
+          <a:p>
+            <a:pPr indent="0" marL="0">
+              <a:buNone/>
+            </a:pPr>
+            <a:r>
+              <a:rPr lang="en-US" sz="900" dirty="0">
+                <a:solidFill>
+                  <a:srgbClr val="CADCEC"/>
+                </a:solidFill>
+                <a:latin typeface="Calibri" pitchFamily="34" charset="0"/>
+                <a:ea typeface="Calibri" pitchFamily="34" charset="-122"/>
+                <a:cs typeface="Calibri" pitchFamily="34" charset="-120"/>
+              </a:rPr>
+              <a:t>1 ses.</a:t>
+            </a:r>
+            <a:endParaRPr lang="en-US" sz="900" dirty="0"/>
+          </a:p>
+        </p:txBody>
+      </p:sp>
+      <p:sp>
+        <p:nvSpPr>
+          <p:cNvPr id="71" name="Text 68"/>
           <p:cNvSpPr/>
           <p:nvPr/>
         </p:nvSpPr>
@@ -14974,7 +15143,7 @@
                 <a:ea typeface="Calibri" pitchFamily="34" charset="-122"/>
                 <a:cs typeface="Calibri" pitchFamily="34" charset="-120"/>
               </a:rPr>
-              <a:t>Direct Lake con tu capacity</a:t>
+              <a:t>Premium Capacity con tu capacity</a:t>
             </a:r>
             <a:endParaRPr lang="en-US" sz="1300" dirty="0"/>
           </a:p>
@@ -15589,7 +15758,7 @@
                 <a:ea typeface="Calibri" pitchFamily="34" charset="-122"/>
                 <a:cs typeface="Calibri" pitchFamily="34" charset="-120"/>
               </a:rPr>
-              <a:t>Updates Fabric/Power BI cada quarter.</a:t>
+              <a:t>Updates Power BI Premium/Power BI cada quarter.</a:t>
             </a:r>
             <a:endParaRPr lang="en-US" sz="1100" dirty="0"/>
           </a:p>
